--- a/docs/submission/rescuehands_slides.pptx
+++ b/docs/submission/rescuehands_slides.pptx
@@ -5870,7 +5870,7 @@
                 </a:solidFill>
                 <a:latin typeface="Segoe UI"/>
               </a:rPr>
-              <a:t>Cup and utensil in their zones, released, supported, cup upright (≤15°), settled, spare utensil untouched, and an ordered IN-AIR hand-off: right alone → both → left alone, with at most 5 steps of contact flicker.</a:t>
+              <a:t>Cup and utensil in their zones, released, supported, cup upright (≤15°), settled, spare utensil still near its start at the end, and an ordered IN-AIR hand-off: right alone → both → left alone, with at most 5 steps of contact flicker.</a:t>
             </a:r>
           </a:p>
         </p:txBody>
@@ -6113,8 +6113,8 @@
           <p:nvPr/>
         </p:nvGraphicFramePr>
         <p:xfrm>
-          <a:off x="548640" y="1737360"/>
-          <a:ext cx="10972800" cy="3200400"/>
+          <a:off x="548640" y="1600200"/>
+          <a:ext cx="10972800" cy="3657600"/>
         </p:xfrm>
         <a:graphic>
           <a:graphicData uri="http://schemas.openxmlformats.org/drawingml/2006/table">
@@ -6135,7 +6135,7 @@
                     <a:lstStyle/>
                     <a:p>
                       <a:r>
-                        <a:rPr sz="1700" b="1">
+                        <a:rPr sz="1600" b="1">
                           <a:solidFill>
                             <a:srgbClr val="FFC440"/>
                           </a:solidFill>
@@ -6157,7 +6157,7 @@
                     <a:lstStyle/>
                     <a:p>
                       <a:r>
-                        <a:rPr sz="1700" b="1">
+                        <a:rPr sz="1600" b="1">
                           <a:solidFill>
                             <a:srgbClr val="FFC440"/>
                           </a:solidFill>
@@ -6179,7 +6179,7 @@
                     <a:lstStyle/>
                     <a:p>
                       <a:r>
-                        <a:rPr sz="1700" b="1">
+                        <a:rPr sz="1600" b="1">
                           <a:solidFill>
                             <a:srgbClr val="FFC440"/>
                           </a:solidFill>
@@ -6201,7 +6201,7 @@
                     <a:lstStyle/>
                     <a:p>
                       <a:r>
-                        <a:rPr sz="1700" b="1">
+                        <a:rPr sz="1600" b="1">
                           <a:solidFill>
                             <a:srgbClr val="FFC440"/>
                           </a:solidFill>
@@ -6225,7 +6225,7 @@
                     <a:lstStyle/>
                     <a:p>
                       <a:r>
-                        <a:rPr sz="1700" b="0">
+                        <a:rPr sz="1600" b="0">
                           <a:solidFill>
                             <a:srgbClr val="F2F5F9"/>
                           </a:solidFill>
@@ -6247,7 +6247,7 @@
                     <a:lstStyle/>
                     <a:p>
                       <a:r>
-                        <a:rPr sz="1700" b="0">
+                        <a:rPr sz="1600" b="0">
                           <a:solidFill>
                             <a:srgbClr val="F2F5F9"/>
                           </a:solidFill>
@@ -6269,7 +6269,7 @@
                     <a:lstStyle/>
                     <a:p>
                       <a:r>
-                        <a:rPr sz="1700" b="0">
+                        <a:rPr sz="1600" b="0">
                           <a:solidFill>
                             <a:srgbClr val="F2F5F9"/>
                           </a:solidFill>
@@ -6291,7 +6291,7 @@
                     <a:lstStyle/>
                     <a:p>
                       <a:r>
-                        <a:rPr sz="1700" b="1">
+                        <a:rPr sz="1600" b="1">
                           <a:solidFill>
                             <a:srgbClr val="F2F5F9"/>
                           </a:solidFill>
@@ -6315,7 +6315,7 @@
                     <a:lstStyle/>
                     <a:p>
                       <a:r>
-                        <a:rPr sz="1700" b="0">
+                        <a:rPr sz="1600" b="0">
                           <a:solidFill>
                             <a:srgbClr val="F2F5F9"/>
                           </a:solidFill>
@@ -6337,7 +6337,7 @@
                     <a:lstStyle/>
                     <a:p>
                       <a:r>
-                        <a:rPr sz="1700" b="0">
+                        <a:rPr sz="1600" b="0">
                           <a:solidFill>
                             <a:srgbClr val="F2F5F9"/>
                           </a:solidFill>
@@ -6359,7 +6359,7 @@
                     <a:lstStyle/>
                     <a:p>
                       <a:r>
-                        <a:rPr sz="1700" b="0">
+                        <a:rPr sz="1600" b="0">
                           <a:solidFill>
                             <a:srgbClr val="F2F5F9"/>
                           </a:solidFill>
@@ -6381,7 +6381,7 @@
                     <a:lstStyle/>
                     <a:p>
                       <a:r>
-                        <a:rPr sz="1700" b="1">
+                        <a:rPr sz="1600" b="1">
                           <a:solidFill>
                             <a:srgbClr val="F2F5F9"/>
                           </a:solidFill>
@@ -6405,7 +6405,7 @@
                     <a:lstStyle/>
                     <a:p>
                       <a:r>
-                        <a:rPr sz="1700" b="0">
+                        <a:rPr sz="1600" b="0">
                           <a:solidFill>
                             <a:srgbClr val="F2F5F9"/>
                           </a:solidFill>
@@ -6427,7 +6427,7 @@
                     <a:lstStyle/>
                     <a:p>
                       <a:r>
-                        <a:rPr sz="1700" b="0">
+                        <a:rPr sz="1600" b="0">
                           <a:solidFill>
                             <a:srgbClr val="F2F5F9"/>
                           </a:solidFill>
@@ -6449,7 +6449,7 @@
                     <a:lstStyle/>
                     <a:p>
                       <a:r>
-                        <a:rPr sz="1700" b="0">
+                        <a:rPr sz="1600" b="0">
                           <a:solidFill>
                             <a:srgbClr val="F2F5F9"/>
                           </a:solidFill>
@@ -6471,7 +6471,7 @@
                     <a:lstStyle/>
                     <a:p>
                       <a:r>
-                        <a:rPr sz="1700" b="1">
+                        <a:rPr sz="1600" b="1">
                           <a:solidFill>
                             <a:srgbClr val="F2F5F9"/>
                           </a:solidFill>
@@ -6495,7 +6495,7 @@
                     <a:lstStyle/>
                     <a:p>
                       <a:r>
-                        <a:rPr sz="1700" b="0">
+                        <a:rPr sz="1600" b="0">
                           <a:solidFill>
                             <a:srgbClr val="F2F5F9"/>
                           </a:solidFill>
@@ -6517,7 +6517,7 @@
                     <a:lstStyle/>
                     <a:p>
                       <a:r>
-                        <a:rPr sz="1700" b="0">
+                        <a:rPr sz="1600" b="0">
                           <a:solidFill>
                             <a:srgbClr val="F2F5F9"/>
                           </a:solidFill>
@@ -6539,7 +6539,7 @@
                     <a:lstStyle/>
                     <a:p>
                       <a:r>
-                        <a:rPr sz="1700" b="0">
+                        <a:rPr sz="1600" b="0">
                           <a:solidFill>
                             <a:srgbClr val="F2F5F9"/>
                           </a:solidFill>
@@ -6561,7 +6561,7 @@
                     <a:lstStyle/>
                     <a:p>
                       <a:r>
-                        <a:rPr sz="1700" b="1">
+                        <a:rPr sz="1600" b="1">
                           <a:solidFill>
                             <a:srgbClr val="FF9F1C"/>
                           </a:solidFill>
@@ -6585,7 +6585,7 @@
                     <a:lstStyle/>
                     <a:p>
                       <a:r>
-                        <a:rPr sz="1700" b="0">
+                        <a:rPr sz="1600" b="0">
                           <a:solidFill>
                             <a:srgbClr val="F2F5F9"/>
                           </a:solidFill>
@@ -6607,7 +6607,7 @@
                     <a:lstStyle/>
                     <a:p>
                       <a:r>
-                        <a:rPr sz="1700" b="0">
+                        <a:rPr sz="1600" b="0">
                           <a:solidFill>
                             <a:srgbClr val="F2F5F9"/>
                           </a:solidFill>
@@ -6629,7 +6629,7 @@
                     <a:lstStyle/>
                     <a:p>
                       <a:r>
-                        <a:rPr sz="1700" b="0">
+                        <a:rPr sz="1600" b="0">
                           <a:solidFill>
                             <a:srgbClr val="F2F5F9"/>
                           </a:solidFill>
@@ -6651,7 +6651,7 @@
                     <a:lstStyle/>
                     <a:p>
                       <a:r>
-                        <a:rPr sz="1700" b="1">
+                        <a:rPr sz="1600" b="1">
                           <a:solidFill>
                             <a:srgbClr val="FF9F1C"/>
                           </a:solidFill>
@@ -6675,7 +6675,7 @@
                     <a:lstStyle/>
                     <a:p>
                       <a:r>
-                        <a:rPr sz="1700" b="0">
+                        <a:rPr sz="1600" b="0">
                           <a:solidFill>
                             <a:srgbClr val="F2F5F9"/>
                           </a:solidFill>
@@ -6697,7 +6697,97 @@
                     <a:lstStyle/>
                     <a:p>
                       <a:r>
-                        <a:rPr sz="1700" b="0">
+                        <a:rPr sz="1600" b="0">
+                          <a:solidFill>
+                            <a:srgbClr val="F2F5F9"/>
+                          </a:solidFill>
+                          <a:latin typeface="Segoe UI"/>
+                        </a:rPr>
+                        <a:t>off</a:t>
+                      </a:r>
+                    </a:p>
+                  </a:txBody>
+                  <a:tcPr>
+                    <a:solidFill>
+                      <a:srgbClr val="182436"/>
+                    </a:solidFill>
+                  </a:tcPr>
+                </a:tc>
+                <a:tc>
+                  <a:txBody>
+                    <a:bodyPr/>
+                    <a:lstStyle/>
+                    <a:p>
+                      <a:r>
+                        <a:rPr sz="1600" b="0">
+                          <a:solidFill>
+                            <a:srgbClr val="F2F5F9"/>
+                          </a:solidFill>
+                          <a:latin typeface="Segoe UI"/>
+                        </a:rPr>
+                        <a:t>yes</a:t>
+                      </a:r>
+                    </a:p>
+                  </a:txBody>
+                  <a:tcPr>
+                    <a:solidFill>
+                      <a:srgbClr val="182436"/>
+                    </a:solidFill>
+                  </a:tcPr>
+                </a:tc>
+                <a:tc>
+                  <a:txBody>
+                    <a:bodyPr/>
+                    <a:lstStyle/>
+                    <a:p>
+                      <a:r>
+                        <a:rPr sz="1600" b="1">
+                          <a:solidFill>
+                            <a:srgbClr val="FF9F1C"/>
+                          </a:solidFill>
+                          <a:latin typeface="Segoe UI"/>
+                        </a:rPr>
+                        <a:t>⟨w⟩/10</a:t>
+                      </a:r>
+                    </a:p>
+                  </a:txBody>
+                  <a:tcPr>
+                    <a:solidFill>
+                      <a:srgbClr val="182436"/>
+                    </a:solidFill>
+                  </a:tcPr>
+                </a:tc>
+              </a:tr>
+              <a:tr h="457200">
+                <a:tc>
+                  <a:txBody>
+                    <a:bodyPr/>
+                    <a:lstStyle/>
+                    <a:p>
+                      <a:r>
+                        <a:rPr sz="1600" b="0">
+                          <a:solidFill>
+                            <a:srgbClr val="F2F5F9"/>
+                          </a:solidFill>
+                          <a:latin typeface="Segoe UI"/>
+                        </a:rPr>
+                        <a:t>SmolVLA v2 · OpenVINO iGPU</a:t>
+                      </a:r>
+                    </a:p>
+                  </a:txBody>
+                  <a:tcPr>
+                    <a:solidFill>
+                      <a:srgbClr val="182436"/>
+                    </a:solidFill>
+                  </a:tcPr>
+                </a:tc>
+                <a:tc>
+                  <a:txBody>
+                    <a:bodyPr/>
+                    <a:lstStyle/>
+                    <a:p>
+                      <a:r>
+                        <a:rPr sz="1600" b="0">
                           <a:solidFill>
                             <a:srgbClr val="F2F5F9"/>
                           </a:solidFill>
@@ -6719,7 +6809,7 @@
                     <a:lstStyle/>
                     <a:p>
                       <a:r>
-                        <a:rPr sz="1700" b="0">
+                        <a:rPr sz="1600" b="0">
                           <a:solidFill>
                             <a:srgbClr val="F2F5F9"/>
                           </a:solidFill>
@@ -6741,7 +6831,7 @@
                     <a:lstStyle/>
                     <a:p>
                       <a:r>
-                        <a:rPr sz="1700" b="1">
+                        <a:rPr sz="1600" b="1">
                           <a:solidFill>
                             <a:srgbClr val="FF9F1C"/>
                           </a:solidFill>
@@ -6770,7 +6860,7 @@
         </p:nvSpPr>
         <p:spPr>
           <a:xfrm>
-            <a:off x="548640" y="5212080"/>
+            <a:off x="548640" y="5486400"/>
             <a:ext cx="11155680" cy="1097280"/>
           </a:xfrm>
           <a:prstGeom prst="rect">
@@ -6790,13 +6880,13 @@
               </a:spcAft>
             </a:pPr>
             <a:r>
-              <a:rPr sz="1600" b="0">
+              <a:rPr sz="1500" b="0">
                 <a:solidFill>
                   <a:srgbClr val="A9B6C6"/>
                 </a:solidFill>
                 <a:latin typeface="Segoe UI"/>
               </a:rPr>
-              <a:t>The supervisor turns 2/10 into 7/10 for the teacher under a real gripper fault. Every number comes from committed result files with run manifests.</a:t>
+              <a:t>Pairs change one thing: same seeds and fault, supervisor on vs off. For the teacher it turns 2/10 into 7/10. Every number comes from committed result files with run manifests.</a:t>
             </a:r>
           </a:p>
         </p:txBody>

--- a/docs/submission/rescuehands_slides.pptx
+++ b/docs/submission/rescuehands_slides.pptx
@@ -6563,11 +6563,11 @@
                       <a:r>
                         <a:rPr sz="1600" b="1">
                           <a:solidFill>
-                            <a:srgbClr val="FF9F1C"/>
+                            <a:srgbClr val="F2F5F9"/>
                           </a:solidFill>
                           <a:latin typeface="Segoe UI"/>
                         </a:rPr>
-                        <a:t>⟨y⟩/10</a:t>
+                        <a:t>not run</a:t>
                       </a:r>
                     </a:p>
                   </a:txBody>
@@ -6653,11 +6653,11 @@
                       <a:r>
                         <a:rPr sz="1600" b="1">
                           <a:solidFill>
-                            <a:srgbClr val="FF9F1C"/>
+                            <a:srgbClr val="F2F5F9"/>
                           </a:solidFill>
                           <a:latin typeface="Segoe UI"/>
                         </a:rPr>
-                        <a:t>⟨x⟩/10</a:t>
+                        <a:t>not run</a:t>
                       </a:r>
                     </a:p>
                   </a:txBody>
@@ -6743,11 +6743,11 @@
                       <a:r>
                         <a:rPr sz="1600" b="1">
                           <a:solidFill>
-                            <a:srgbClr val="FF9F1C"/>
+                            <a:srgbClr val="F2F5F9"/>
                           </a:solidFill>
                           <a:latin typeface="Segoe UI"/>
                         </a:rPr>
-                        <a:t>⟨w⟩/10</a:t>
+                        <a:t>running</a:t>
                       </a:r>
                     </a:p>
                   </a:txBody>
@@ -6833,11 +6833,11 @@
                       <a:r>
                         <a:rPr sz="1600" b="1">
                           <a:solidFill>
-                            <a:srgbClr val="FF9F1C"/>
+                            <a:srgbClr val="F2F5F9"/>
                           </a:solidFill>
                           <a:latin typeface="Segoe UI"/>
                         </a:rPr>
-                        <a:t>⟨z⟩/10</a:t>
+                        <a:t>1/10</a:t>
                       </a:r>
                     </a:p>
                   </a:txBody>
@@ -7117,11 +7117,11 @@
                       <a:r>
                         <a:rPr sz="1600" b="0">
                           <a:solidFill>
-                            <a:srgbClr val="FF9F1C"/>
+                            <a:srgbClr val="F2F5F9"/>
                           </a:solidFill>
                           <a:latin typeface="Segoe UI"/>
                         </a:rPr>
-                        <a:t>⟨b⟩ s</a:t>
+                        <a:t>≈190 s (v1)</a:t>
                       </a:r>
                     </a:p>
                   </a:txBody>
@@ -7139,11 +7139,11 @@
                       <a:r>
                         <a:rPr sz="1600" b="0">
                           <a:solidFill>
-                            <a:srgbClr val="FF9F1C"/>
+                            <a:srgbClr val="F2F5F9"/>
                           </a:solidFill>
                           <a:latin typeface="Segoe UI"/>
                         </a:rPr>
-                        <a:t>⟨d⟩ rad</a:t>
+                        <a:t>0.004 rad (v1)</a:t>
                       </a:r>
                     </a:p>
                   </a:txBody>
@@ -7185,11 +7185,11 @@
                       <a:r>
                         <a:rPr sz="1600" b="0">
                           <a:solidFill>
-                            <a:srgbClr val="FF9F1C"/>
+                            <a:srgbClr val="F2F5F9"/>
                           </a:solidFill>
                           <a:latin typeface="Segoe UI"/>
                         </a:rPr>
-                        <a:t>⟨e⟩ s</a:t>
+                        <a:t>13.9 s (v1)</a:t>
                       </a:r>
                     </a:p>
                   </a:txBody>
@@ -7253,11 +7253,11 @@
                       <a:r>
                         <a:rPr sz="1600" b="0">
                           <a:solidFill>
-                            <a:srgbClr val="FF9F1C"/>
+                            <a:srgbClr val="F2F5F9"/>
                           </a:solidFill>
                           <a:latin typeface="Segoe UI"/>
                         </a:rPr>
-                        <a:t>⟨a⟩ s</a:t>
+                        <a:t>4.53 s</a:t>
                       </a:r>
                     </a:p>
                   </a:txBody>
@@ -7275,11 +7275,11 @@
                       <a:r>
                         <a:rPr sz="1600" b="0">
                           <a:solidFill>
-                            <a:srgbClr val="FF9F1C"/>
+                            <a:srgbClr val="F2F5F9"/>
                           </a:solidFill>
                           <a:latin typeface="Segoe UI"/>
                         </a:rPr>
-                        <a:t>⟨d⟩ rad</a:t>
+                        <a:t>0.004 rad (v1)</a:t>
                       </a:r>
                     </a:p>
                   </a:txBody>
@@ -7321,11 +7321,11 @@
                       <a:r>
                         <a:rPr sz="1600" b="0">
                           <a:solidFill>
-                            <a:srgbClr val="FF9F1C"/>
+                            <a:srgbClr val="F2F5F9"/>
                           </a:solidFill>
                           <a:latin typeface="Segoe UI"/>
                         </a:rPr>
-                        <a:t>⟨f⟩ s</a:t>
+                        <a:t>not measured</a:t>
                       </a:r>
                     </a:p>
                   </a:txBody>
@@ -7343,11 +7343,11 @@
                       <a:r>
                         <a:rPr sz="1600" b="0">
                           <a:solidFill>
-                            <a:srgbClr val="FF9F1C"/>
+                            <a:srgbClr val="F2F5F9"/>
                           </a:solidFill>
                           <a:latin typeface="Segoe UI"/>
                         </a:rPr>
-                        <a:t>⟨g⟩ rad</a:t>
+                        <a:t>—</a:t>
                       </a:r>
                     </a:p>
                   </a:txBody>
@@ -7392,11 +7392,11 @@
             <a:r>
               <a:rPr sz="1700" b="0">
                 <a:solidFill>
-                  <a:srgbClr val="FF9F1C"/>
+                  <a:srgbClr val="F2F5F9"/>
                 </a:solidFill>
                 <a:latin typeface="Segoe UI"/>
               </a:rPr>
-              <a:t>•  iGPU speed-up over PyTorch CPU: ⟨c⟩×, with its accuracy cost reported next to it</a:t>
+              <a:t>•  iGPU speed-up over PyTorch CPU: ≈40×, with its accuracy cost reported next to it</a:t>
             </a:r>
           </a:p>
           <a:p>
